--- a/system-design-101/vi/lessons/sd-08-024/slides/sd-08-024.pptx
+++ b/system-design-101/vi/lessons/sd-08-024/slides/sd-08-024.pptx
@@ -10447,7 +10447,7 @@
                 <a:ea typeface="Bricolage Grotesque ExtraBold" pitchFamily="34" charset="-122"/>
                 <a:cs typeface="Bricolage Grotesque ExtraBold" pitchFamily="34" charset="-120"/>
               </a:rPr>
-              <a:t> 5</a:t>
+              <a:t> 3</a:t>
             </a:r>
             <a:r>
               <a:rPr lang="en-US" sz="4650" dirty="0" spc="-1" kern="0">
